--- a/triageai-review/TriageAI_Headache_Flow_DRAFT.pptx
+++ b/triageai-review/TriageAI_Headache_Flow_DRAFT.pptx
@@ -11,6 +11,8 @@
     <p:sldId id="259" r:id="rId10"/>
     <p:sldId id="260" r:id="rId11"/>
     <p:sldId id="261" r:id="rId12"/>
+    <p:sldId id="262" r:id="rId13"/>
+    <p:sldId id="263" r:id="rId14"/>
   </p:sldIdLst>
   <p:sldSz cx="12191695" cy="6858000" type="screen4x3"/>
   <p:notesSz cx="6858000" cy="9144000"/>
@@ -3254,7 +3256,7 @@
                 </a:solidFill>
                 <a:latin typeface="Calibri"/>
               </a:rPr>
-              <a:t>A first draft for Dr Ogwuna and Dr Daleng to correct</a:t>
+              <a:t>A first draft for any reviewing clinician to correct</a:t>
             </a:r>
           </a:p>
         </p:txBody>
@@ -3520,7 +3522,7 @@
                 </a:solidFill>
                 <a:latin typeface="Calibri"/>
               </a:rPr>
-              <a:t>2 / 6</a:t>
+              <a:t>2 / 8</a:t>
             </a:r>
           </a:p>
         </p:txBody>
@@ -4220,7 +4222,7 @@
                 </a:solidFill>
                 <a:latin typeface="Calibri"/>
               </a:rPr>
-              <a:t>Step 1: red-flag questions</a:t>
+              <a:t>What the symptoms can look like</a:t>
             </a:r>
           </a:p>
         </p:txBody>
@@ -4259,7 +4261,7 @@
                 </a:solidFill>
                 <a:latin typeface="Calibri"/>
               </a:rPr>
-              <a:t>3 / 6</a:t>
+              <a:t>3 / 8</a:t>
             </a:r>
           </a:p>
         </p:txBody>
@@ -4381,21 +4383,117 @@
                 </a:solidFill>
                 <a:latin typeface="Calibri"/>
               </a:rPr>
-              <a:t>Any "yes" leads straight to EMERGENCY. Please check this list hard.</a:t>
-            </a:r>
-          </a:p>
-        </p:txBody>
-      </p:sp>
-      <p:sp>
-        <p:nvSpPr>
-          <p:cNvPr id="8" name="TextBox 7"/>
+              <a:t>Illustrations to help a reviewer picture each warning sign. Not diagnostic images.</a:t>
+            </a:r>
+          </a:p>
+        </p:txBody>
+      </p:sp>
+      <p:pic>
+        <p:nvPicPr>
+          <p:cNvPr id="8" name="Picture 7" descr="f_headache.png"/>
+          <p:cNvPicPr>
+            <a:picLocks noChangeAspect="1"/>
+          </p:cNvPicPr>
+          <p:nvPr/>
+        </p:nvPicPr>
+        <p:blipFill>
+          <a:blip r:embed="rId2"/>
+          <a:stretch>
+            <a:fillRect/>
+          </a:stretch>
+        </p:blipFill>
+        <p:spPr>
+          <a:xfrm>
+            <a:off x="548640" y="1783080"/>
+            <a:ext cx="2651760" cy="2651760"/>
+          </a:xfrm>
+          <a:prstGeom prst="rect">
+            <a:avLst/>
+          </a:prstGeom>
+        </p:spPr>
+      </p:pic>
+      <p:pic>
+        <p:nvPicPr>
+          <p:cNvPr id="9" name="Picture 8" descr="m_headache_a.png"/>
+          <p:cNvPicPr>
+            <a:picLocks noChangeAspect="1"/>
+          </p:cNvPicPr>
+          <p:nvPr/>
+        </p:nvPicPr>
+        <p:blipFill>
+          <a:blip r:embed="rId3"/>
+          <a:stretch>
+            <a:fillRect/>
+          </a:stretch>
+        </p:blipFill>
+        <p:spPr>
+          <a:xfrm>
+            <a:off x="3383280" y="1783080"/>
+            <a:ext cx="2651760" cy="2651760"/>
+          </a:xfrm>
+          <a:prstGeom prst="rect">
+            <a:avLst/>
+          </a:prstGeom>
+        </p:spPr>
+      </p:pic>
+      <p:pic>
+        <p:nvPicPr>
+          <p:cNvPr id="10" name="Picture 9" descr="f_neck.png"/>
+          <p:cNvPicPr>
+            <a:picLocks noChangeAspect="1"/>
+          </p:cNvPicPr>
+          <p:nvPr/>
+        </p:nvPicPr>
+        <p:blipFill>
+          <a:blip r:embed="rId4"/>
+          <a:stretch>
+            <a:fillRect/>
+          </a:stretch>
+        </p:blipFill>
+        <p:spPr>
+          <a:xfrm>
+            <a:off x="6217920" y="1783080"/>
+            <a:ext cx="2651760" cy="2651760"/>
+          </a:xfrm>
+          <a:prstGeom prst="rect">
+            <a:avLst/>
+          </a:prstGeom>
+        </p:spPr>
+      </p:pic>
+      <p:pic>
+        <p:nvPicPr>
+          <p:cNvPr id="11" name="Picture 10" descr="m_neck.png"/>
+          <p:cNvPicPr>
+            <a:picLocks noChangeAspect="1"/>
+          </p:cNvPicPr>
+          <p:nvPr/>
+        </p:nvPicPr>
+        <p:blipFill>
+          <a:blip r:embed="rId5"/>
+          <a:stretch>
+            <a:fillRect/>
+          </a:stretch>
+        </p:blipFill>
+        <p:spPr>
+          <a:xfrm>
+            <a:off x="9052560" y="1783080"/>
+            <a:ext cx="2651760" cy="2651760"/>
+          </a:xfrm>
+          <a:prstGeom prst="rect">
+            <a:avLst/>
+          </a:prstGeom>
+        </p:spPr>
+      </p:pic>
+      <p:sp>
+        <p:nvSpPr>
+          <p:cNvPr id="12" name="TextBox 11"/>
           <p:cNvSpPr txBox="1"/>
           <p:nvPr/>
         </p:nvSpPr>
         <p:spPr>
           <a:xfrm>
-            <a:off x="548640" y="1737360"/>
-            <a:ext cx="6949440" cy="4663440"/>
+            <a:off x="548640" y="4526280"/>
+            <a:ext cx="5486400" cy="548640"/>
           </a:xfrm>
           <a:prstGeom prst="rect">
             <a:avLst/>
@@ -4414,185 +4512,27 @@
               </a:spcAft>
             </a:pPr>
             <a:r>
-              <a:rPr sz="1500" b="0">
-                <a:solidFill>
-                  <a:srgbClr val="444F5A"/>
-                </a:solidFill>
-                <a:latin typeface="Calibri"/>
-              </a:rPr>
-              <a:t>1.  Did it come on suddenly and reach full pain within a minute (like a thunderclap)?</a:t>
-            </a:r>
-          </a:p>
-          <a:p>
-            <a:pPr algn="l">
-              <a:spcAft>
-                <a:spcPts val="500"/>
-              </a:spcAft>
-            </a:pPr>
-            <a:r>
-              <a:rPr sz="1500" b="0">
-                <a:solidFill>
-                  <a:srgbClr val="444F5A"/>
-                </a:solidFill>
-                <a:latin typeface="Calibri"/>
-              </a:rPr>
-              <a:t>2.  Is it the worst headache you have ever had?</a:t>
-            </a:r>
-          </a:p>
-          <a:p>
-            <a:pPr algn="l">
-              <a:spcAft>
-                <a:spcPts val="500"/>
-              </a:spcAft>
-            </a:pPr>
-            <a:r>
-              <a:rPr sz="1500" b="0">
-                <a:solidFill>
-                  <a:srgbClr val="444F5A"/>
-                </a:solidFill>
-                <a:latin typeface="Calibri"/>
-              </a:rPr>
-              <a:t>3.  Do you have a stiff neck, or a fever with the headache?</a:t>
-            </a:r>
-          </a:p>
-          <a:p>
-            <a:pPr algn="l">
-              <a:spcAft>
-                <a:spcPts val="500"/>
-              </a:spcAft>
-            </a:pPr>
-            <a:r>
-              <a:rPr sz="1500" b="0">
-                <a:solidFill>
-                  <a:srgbClr val="444F5A"/>
-                </a:solidFill>
-                <a:latin typeface="Calibri"/>
-              </a:rPr>
-              <a:t>4.  Any weakness, numbness, face drooping, trouble speaking or confusion?</a:t>
-            </a:r>
-          </a:p>
-          <a:p>
-            <a:pPr algn="l">
-              <a:spcAft>
-                <a:spcPts val="500"/>
-              </a:spcAft>
-            </a:pPr>
-            <a:r>
-              <a:rPr sz="1500" b="0">
-                <a:solidFill>
-                  <a:srgbClr val="444F5A"/>
-                </a:solidFill>
-                <a:latin typeface="Calibri"/>
-              </a:rPr>
-              <a:t>5.  Any new loss of vision, double vision, or a seizure?</a:t>
-            </a:r>
-          </a:p>
-          <a:p>
-            <a:pPr algn="l">
-              <a:spcAft>
-                <a:spcPts val="500"/>
-              </a:spcAft>
-            </a:pPr>
-            <a:r>
-              <a:rPr sz="1500" b="0">
-                <a:solidFill>
-                  <a:srgbClr val="444F5A"/>
-                </a:solidFill>
-                <a:latin typeface="Calibri"/>
-              </a:rPr>
-              <a:t>6.  Did it follow a head injury or a fall?</a:t>
-            </a:r>
-          </a:p>
-          <a:p>
-            <a:pPr algn="l">
-              <a:spcAft>
-                <a:spcPts val="500"/>
-              </a:spcAft>
-            </a:pPr>
-            <a:r>
-              <a:rPr sz="1500" b="0">
-                <a:solidFill>
-                  <a:srgbClr val="444F5A"/>
-                </a:solidFill>
-                <a:latin typeface="Calibri"/>
-              </a:rPr>
-              <a:t>7.  Have you fainted, or are you very drowsy and hard to wake?</a:t>
-            </a:r>
-          </a:p>
-          <a:p>
-            <a:pPr algn="l">
-              <a:spcAft>
-                <a:spcPts val="500"/>
-              </a:spcAft>
-            </a:pPr>
-            <a:r>
-              <a:rPr sz="1500" b="0">
-                <a:solidFill>
-                  <a:srgbClr val="444F5A"/>
-                </a:solidFill>
-                <a:latin typeface="Calibri"/>
-              </a:rPr>
-              <a:t>8.  Are you pregnant (or just given birth) with a severe headache, swelling or visual changes?</a:t>
-            </a:r>
-          </a:p>
-        </p:txBody>
-      </p:sp>
-      <p:sp>
-        <p:nvSpPr>
-          <p:cNvPr id="9" name="Rectangle 8"/>
-          <p:cNvSpPr/>
-          <p:nvPr/>
-        </p:nvSpPr>
-        <p:spPr>
-          <a:xfrm>
-            <a:off x="7863840" y="1783080"/>
-            <a:ext cx="3840480" cy="4480560"/>
-          </a:xfrm>
-          <a:prstGeom prst="rect">
-            <a:avLst/>
-          </a:prstGeom>
-          <a:solidFill>
-            <a:srgbClr val="F2F6F9"/>
-          </a:solidFill>
-          <a:ln w="19050">
-            <a:solidFill>
-              <a:srgbClr val="0E7C86"/>
-            </a:solidFill>
-          </a:ln>
-          <a:effectLst/>
-        </p:spPr>
-        <p:style>
-          <a:lnRef idx="1">
-            <a:schemeClr val="accent1"/>
-          </a:lnRef>
-          <a:fillRef idx="3">
-            <a:schemeClr val="accent1"/>
-          </a:fillRef>
-          <a:effectRef idx="2">
-            <a:schemeClr val="accent1"/>
-          </a:effectRef>
-          <a:fontRef idx="minor">
-            <a:schemeClr val="lt1"/>
-          </a:fontRef>
-        </p:style>
-        <p:txBody>
-          <a:bodyPr rtlCol="0" anchor="ctr"/>
-          <a:lstStyle/>
-          <a:p>
-            <a:pPr algn="ctr"/>
-          </a:p>
-        </p:txBody>
-      </p:sp>
-      <p:sp>
-        <p:nvSpPr>
-          <p:cNvPr id="10" name="TextBox 9"/>
+              <a:rPr sz="1400" b="1">
+                <a:solidFill>
+                  <a:srgbClr val="0B2A4A"/>
+                </a:solidFill>
+                <a:latin typeface="Calibri"/>
+              </a:rPr>
+              <a:t>Severe headache: hands to the temples, pain behind the eyes, throbbing.</a:t>
+            </a:r>
+          </a:p>
+        </p:txBody>
+      </p:sp>
+      <p:sp>
+        <p:nvSpPr>
+          <p:cNvPr id="13" name="TextBox 12"/>
           <p:cNvSpPr txBox="1"/>
           <p:nvPr/>
         </p:nvSpPr>
         <p:spPr>
           <a:xfrm>
-            <a:off x="8001000" y="1828800"/>
-            <a:ext cx="3566160" cy="365760"/>
+            <a:off x="6217920" y="4526280"/>
+            <a:ext cx="5486400" cy="548640"/>
           </a:xfrm>
           <a:prstGeom prst="rect">
             <a:avLst/>
@@ -4611,27 +4551,27 @@
               </a:spcAft>
             </a:pPr>
             <a:r>
-              <a:rPr sz="1600" b="1">
-                <a:solidFill>
-                  <a:srgbClr val="0E7C86"/>
-                </a:solidFill>
-                <a:latin typeface="Calibri"/>
-              </a:rPr>
-              <a:t>Questions for you</a:t>
-            </a:r>
-          </a:p>
-        </p:txBody>
-      </p:sp>
-      <p:sp>
-        <p:nvSpPr>
-          <p:cNvPr id="11" name="TextBox 10"/>
+              <a:rPr sz="1400" b="1">
+                <a:solidFill>
+                  <a:srgbClr val="0B2A4A"/>
+                </a:solidFill>
+                <a:latin typeface="Calibri"/>
+              </a:rPr>
+              <a:t>Stiff neck with fever: neck held rigid, flushed face, discomfort bending forward.</a:t>
+            </a:r>
+          </a:p>
+        </p:txBody>
+      </p:sp>
+      <p:sp>
+        <p:nvSpPr>
+          <p:cNvPr id="14" name="TextBox 13"/>
           <p:cNvSpPr txBox="1"/>
           <p:nvPr/>
         </p:nvSpPr>
         <p:spPr>
           <a:xfrm>
-            <a:off x="8001000" y="2286000"/>
-            <a:ext cx="3566160" cy="3931920"/>
+            <a:off x="548640" y="5394960"/>
+            <a:ext cx="11064240" cy="914400"/>
           </a:xfrm>
           <a:prstGeom prst="rect">
             <a:avLst/>
@@ -4652,59 +4592,11 @@
             <a:r>
               <a:rPr sz="1400" b="0">
                 <a:solidFill>
-                  <a:srgbClr val="444F5A"/>
-                </a:solidFill>
-                <a:latin typeface="Calibri"/>
-              </a:rPr>
-              <a:t>Is anything on this list wrong or missing?</a:t>
-            </a:r>
-          </a:p>
-          <a:p>
-            <a:pPr algn="l">
-              <a:spcAft>
-                <a:spcPts val="500"/>
-              </a:spcAft>
-            </a:pPr>
-            <a:r>
-              <a:rPr sz="1400" b="0">
-                <a:solidFill>
-                  <a:srgbClr val="444F5A"/>
-                </a:solidFill>
-                <a:latin typeface="Calibri"/>
-              </a:rPr>
-              <a:t>Should "known HIV or on chemotherapy" or "age over 50 with a new headache" be red flags?</a:t>
-            </a:r>
-          </a:p>
-          <a:p>
-            <a:pPr algn="l">
-              <a:spcAft>
-                <a:spcPts val="500"/>
-              </a:spcAft>
-            </a:pPr>
-            <a:r>
-              <a:rPr sz="1400" b="0">
-                <a:solidFill>
-                  <a:srgbClr val="444F5A"/>
-                </a:solidFill>
-                <a:latin typeface="Calibri"/>
-              </a:rPr>
-              <a:t>Is the pregnancy question worded safely?</a:t>
-            </a:r>
-          </a:p>
-          <a:p>
-            <a:pPr algn="l">
-              <a:spcAft>
-                <a:spcPts val="500"/>
-              </a:spcAft>
-            </a:pPr>
-            <a:r>
-              <a:rPr sz="1400" b="0">
-                <a:solidFill>
-                  <a:srgbClr val="444F5A"/>
-                </a:solidFill>
-                <a:latin typeface="Calibri"/>
-              </a:rPr>
-              <a:t>Are 8 red flags too many for an SMS flow?</a:t>
+                  <a:srgbClr val="0B2A4A"/>
+                </a:solidFill>
+                <a:latin typeface="Calibri"/>
+              </a:rPr>
+              <a:t>Your call: do these show the right picture of each symptom? Which expression or posture is missing or misleading for the people we are trying to reach?</a:t>
             </a:r>
           </a:p>
         </p:txBody>
@@ -4805,7 +4697,7 @@
                 </a:solidFill>
                 <a:latin typeface="Calibri"/>
               </a:rPr>
-              <a:t>Step 2: if every red flag is "no"</a:t>
+              <a:t>Step 1: red-flag questions</a:t>
             </a:r>
           </a:p>
         </p:txBody>
@@ -4844,7 +4736,7 @@
                 </a:solidFill>
                 <a:latin typeface="Calibri"/>
               </a:rPr>
-              <a:t>4 / 6</a:t>
+              <a:t>4 / 8</a:t>
             </a:r>
           </a:p>
         </p:txBody>
@@ -4966,7 +4858,7 @@
                 </a:solidFill>
                 <a:latin typeface="Calibri"/>
               </a:rPr>
-              <a:t>A few context questions decide between CLINIC TODAY and SELF-CARE</a:t>
+              <a:t>Any "yes" leads straight to EMERGENCY. Please check this list hard.</a:t>
             </a:r>
           </a:p>
         </p:txBody>
@@ -4980,7 +4872,7 @@
         <p:spPr>
           <a:xfrm>
             <a:off x="548640" y="1737360"/>
-            <a:ext cx="5852160" cy="4572000"/>
+            <a:ext cx="6949440" cy="4663440"/>
           </a:xfrm>
           <a:prstGeom prst="rect">
             <a:avLst/>
@@ -5005,7 +4897,7 @@
                 </a:solidFill>
                 <a:latin typeface="Calibri"/>
               </a:rPr>
-              <a:t>A.  How long have you had this headache?</a:t>
+              <a:t>1.  Did it come on suddenly and reach full pain within a minute (like a thunderclap)?</a:t>
             </a:r>
           </a:p>
           <a:p>
@@ -5021,7 +4913,7 @@
                 </a:solidFill>
                 <a:latin typeface="Calibri"/>
               </a:rPr>
-              <a:t>     Under 24 hours  |  1 to 3 days  |  more than 3 days</a:t>
+              <a:t>2.  Is it the worst headache you have ever had?</a:t>
             </a:r>
           </a:p>
           <a:p>
@@ -5037,7 +4929,7 @@
                 </a:solidFill>
                 <a:latin typeface="Calibri"/>
               </a:rPr>
-              <a:t>B.  Is it getting worse day by day, or waking you from sleep?</a:t>
+              <a:t>3.  Do you have a stiff neck, or a fever with the headache?</a:t>
             </a:r>
           </a:p>
           <a:p>
@@ -5053,7 +4945,7 @@
                 </a:solidFill>
                 <a:latin typeface="Calibri"/>
               </a:rPr>
-              <a:t>C.  Do you have vomiting that will not stop, or cannot keep fluids down?</a:t>
+              <a:t>4.  Any weakness, numbness, face drooping, trouble speaking or confusion?</a:t>
             </a:r>
           </a:p>
           <a:p>
@@ -5069,7 +4961,7 @@
                 </a:solidFill>
                 <a:latin typeface="Calibri"/>
               </a:rPr>
-              <a:t>D.  Are you over 50 with a headache that is new for you?</a:t>
+              <a:t>5.  Any new loss of vision, double vision, or a seizure?</a:t>
             </a:r>
           </a:p>
           <a:p>
@@ -5085,7 +4977,7 @@
                 </a:solidFill>
                 <a:latin typeface="Calibri"/>
               </a:rPr>
-              <a:t>E.  Do you have a long-term illness or a weak immune system?</a:t>
+              <a:t>6.  Did it follow a head injury or a fall?</a:t>
             </a:r>
           </a:p>
           <a:p>
@@ -5101,7 +4993,23 @@
                 </a:solidFill>
                 <a:latin typeface="Calibri"/>
               </a:rPr>
-              <a:t>F.  Is the pain stopping you doing normal daily things?</a:t>
+              <a:t>7.  Have you fainted, or are you very drowsy and hard to wake?</a:t>
+            </a:r>
+          </a:p>
+          <a:p>
+            <a:pPr algn="l">
+              <a:spcAft>
+                <a:spcPts val="500"/>
+              </a:spcAft>
+            </a:pPr>
+            <a:r>
+              <a:rPr sz="1500" b="0">
+                <a:solidFill>
+                  <a:srgbClr val="444F5A"/>
+                </a:solidFill>
+                <a:latin typeface="Calibri"/>
+              </a:rPr>
+              <a:t>8.  Are you pregnant (or just given birth) with a severe headache, swelling or visual changes?</a:t>
             </a:r>
           </a:p>
         </p:txBody>
@@ -5114,8 +5022,8 @@
         </p:nvSpPr>
         <p:spPr>
           <a:xfrm>
-            <a:off x="6766560" y="1783080"/>
-            <a:ext cx="4937760" cy="2011680"/>
+            <a:off x="7863840" y="1783080"/>
+            <a:ext cx="3840480" cy="4480560"/>
           </a:xfrm>
           <a:prstGeom prst="rect">
             <a:avLst/>
@@ -5125,7 +5033,7 @@
           </a:solidFill>
           <a:ln w="19050">
             <a:solidFill>
-              <a:srgbClr val="B46A00"/>
+              <a:srgbClr val="0E7C86"/>
             </a:solidFill>
           </a:ln>
           <a:effectLst/>
@@ -5160,8 +5068,8 @@
         </p:nvSpPr>
         <p:spPr>
           <a:xfrm>
-            <a:off x="6858000" y="1828800"/>
-            <a:ext cx="4754880" cy="1920240"/>
+            <a:off x="8001000" y="1828800"/>
+            <a:ext cx="3566160" cy="365760"/>
           </a:xfrm>
           <a:prstGeom prst="rect">
             <a:avLst/>
@@ -5180,89 +5088,27 @@
               </a:spcAft>
             </a:pPr>
             <a:r>
-              <a:rPr sz="1400" b="1">
-                <a:solidFill>
-                  <a:srgbClr val="B46A00"/>
-                </a:solidFill>
-                <a:latin typeface="Calibri"/>
-              </a:rPr>
-              <a:t>CLINIC TODAY if any of:</a:t>
-            </a:r>
-          </a:p>
-          <a:p>
-            <a:pPr algn="l">
-              <a:spcAft>
-                <a:spcPts val="500"/>
-              </a:spcAft>
-            </a:pPr>
-            <a:r>
-              <a:rPr sz="1400" b="1">
-                <a:solidFill>
-                  <a:srgbClr val="B46A00"/>
-                </a:solidFill>
-                <a:latin typeface="Calibri"/>
-              </a:rPr>
-              <a:t>B yes  |  C yes  |  D yes  |  E yes  |  A is more than 3 days  |  F yes with fever</a:t>
-            </a:r>
-          </a:p>
-        </p:txBody>
-      </p:sp>
-      <p:sp>
-        <p:nvSpPr>
-          <p:cNvPr id="11" name="Rectangle 10"/>
-          <p:cNvSpPr/>
-          <p:nvPr/>
-        </p:nvSpPr>
-        <p:spPr>
-          <a:xfrm>
-            <a:off x="6766560" y="3931920"/>
-            <a:ext cx="4937760" cy="1463040"/>
-          </a:xfrm>
-          <a:prstGeom prst="rect">
-            <a:avLst/>
-          </a:prstGeom>
-          <a:solidFill>
-            <a:srgbClr val="F2F6F9"/>
-          </a:solidFill>
-          <a:ln w="19050">
-            <a:solidFill>
-              <a:srgbClr val="1E7B3A"/>
-            </a:solidFill>
-          </a:ln>
-          <a:effectLst/>
-        </p:spPr>
-        <p:style>
-          <a:lnRef idx="1">
-            <a:schemeClr val="accent1"/>
-          </a:lnRef>
-          <a:fillRef idx="3">
-            <a:schemeClr val="accent1"/>
-          </a:fillRef>
-          <a:effectRef idx="2">
-            <a:schemeClr val="accent1"/>
-          </a:effectRef>
-          <a:fontRef idx="minor">
-            <a:schemeClr val="lt1"/>
-          </a:fontRef>
-        </p:style>
-        <p:txBody>
-          <a:bodyPr rtlCol="0" anchor="ctr"/>
-          <a:lstStyle/>
-          <a:p>
-            <a:pPr algn="ctr"/>
-          </a:p>
-        </p:txBody>
-      </p:sp>
-      <p:sp>
-        <p:nvSpPr>
-          <p:cNvPr id="12" name="TextBox 11"/>
+              <a:rPr sz="1600" b="1">
+                <a:solidFill>
+                  <a:srgbClr val="0E7C86"/>
+                </a:solidFill>
+                <a:latin typeface="Calibri"/>
+              </a:rPr>
+              <a:t>Questions for you</a:t>
+            </a:r>
+          </a:p>
+        </p:txBody>
+      </p:sp>
+      <p:sp>
+        <p:nvSpPr>
+          <p:cNvPr id="11" name="TextBox 10"/>
           <p:cNvSpPr txBox="1"/>
           <p:nvPr/>
         </p:nvSpPr>
         <p:spPr>
           <a:xfrm>
-            <a:off x="6858000" y="3977639"/>
-            <a:ext cx="4754880" cy="1371600"/>
+            <a:off x="8001000" y="2286000"/>
+            <a:ext cx="3566160" cy="3931920"/>
           </a:xfrm>
           <a:prstGeom prst="rect">
             <a:avLst/>
@@ -5281,68 +5127,61 @@
               </a:spcAft>
             </a:pPr>
             <a:r>
-              <a:rPr sz="1400" b="1">
-                <a:solidFill>
-                  <a:srgbClr val="1E7B3A"/>
-                </a:solidFill>
-                <a:latin typeface="Calibri"/>
-              </a:rPr>
-              <a:t>SELF-CARE if:</a:t>
-            </a:r>
-          </a:p>
-          <a:p>
-            <a:pPr algn="l">
-              <a:spcAft>
-                <a:spcPts val="500"/>
-              </a:spcAft>
-            </a:pPr>
-            <a:r>
-              <a:rPr sz="1400" b="1">
-                <a:solidFill>
-                  <a:srgbClr val="1E7B3A"/>
-                </a:solidFill>
-                <a:latin typeface="Calibri"/>
-              </a:rPr>
-              <a:t>none of the above apply</a:t>
-            </a:r>
-          </a:p>
-        </p:txBody>
-      </p:sp>
-      <p:sp>
-        <p:nvSpPr>
-          <p:cNvPr id="13" name="TextBox 12"/>
-          <p:cNvSpPr txBox="1"/>
-          <p:nvPr/>
-        </p:nvSpPr>
-        <p:spPr>
-          <a:xfrm>
-            <a:off x="6766560" y="5486400"/>
-            <a:ext cx="4937760" cy="914400"/>
-          </a:xfrm>
-          <a:prstGeom prst="rect">
-            <a:avLst/>
-          </a:prstGeom>
-          <a:noFill/>
-        </p:spPr>
-        <p:txBody>
-          <a:bodyPr wrap="square" anchor="t" lIns="45720" rIns="45720" tIns="27432" bIns="27432">
-            <a:spAutoFit/>
-          </a:bodyPr>
-          <a:lstStyle/>
-          <a:p>
-            <a:pPr algn="l">
-              <a:spcAft>
-                <a:spcPts val="500"/>
-              </a:spcAft>
-            </a:pPr>
-            <a:r>
               <a:rPr sz="1400" b="0">
                 <a:solidFill>
-                  <a:srgbClr val="0B2A4A"/>
-                </a:solidFill>
-                <a:latin typeface="Calibri"/>
-              </a:rPr>
-              <a:t>Your call: are these thresholds sensible, and is anything missing for children?</a:t>
+                  <a:srgbClr val="444F5A"/>
+                </a:solidFill>
+                <a:latin typeface="Calibri"/>
+              </a:rPr>
+              <a:t>Is anything on this list wrong or missing?</a:t>
+            </a:r>
+          </a:p>
+          <a:p>
+            <a:pPr algn="l">
+              <a:spcAft>
+                <a:spcPts val="500"/>
+              </a:spcAft>
+            </a:pPr>
+            <a:r>
+              <a:rPr sz="1400" b="0">
+                <a:solidFill>
+                  <a:srgbClr val="444F5A"/>
+                </a:solidFill>
+                <a:latin typeface="Calibri"/>
+              </a:rPr>
+              <a:t>Should "known HIV or on chemotherapy" or "age over 50 with a new headache" be red flags?</a:t>
+            </a:r>
+          </a:p>
+          <a:p>
+            <a:pPr algn="l">
+              <a:spcAft>
+                <a:spcPts val="500"/>
+              </a:spcAft>
+            </a:pPr>
+            <a:r>
+              <a:rPr sz="1400" b="0">
+                <a:solidFill>
+                  <a:srgbClr val="444F5A"/>
+                </a:solidFill>
+                <a:latin typeface="Calibri"/>
+              </a:rPr>
+              <a:t>Is the pregnancy question worded safely?</a:t>
+            </a:r>
+          </a:p>
+          <a:p>
+            <a:pPr algn="l">
+              <a:spcAft>
+                <a:spcPts val="500"/>
+              </a:spcAft>
+            </a:pPr>
+            <a:r>
+              <a:rPr sz="1400" b="0">
+                <a:solidFill>
+                  <a:srgbClr val="444F5A"/>
+                </a:solidFill>
+                <a:latin typeface="Calibri"/>
+              </a:rPr>
+              <a:t>Are 8 red flags too many for an SMS flow?</a:t>
             </a:r>
           </a:p>
         </p:txBody>
@@ -5443,7 +5282,7 @@
                 </a:solidFill>
                 <a:latin typeface="Calibri"/>
               </a:rPr>
-              <a:t>Step 3: what the person sees</a:t>
+              <a:t>Emergency signs shown visually</a:t>
             </a:r>
           </a:p>
         </p:txBody>
@@ -5482,7 +5321,7 @@
                 </a:solidFill>
                 <a:latin typeface="Calibri"/>
               </a:rPr>
-              <a:t>5 / 6</a:t>
+              <a:t>5 / 8</a:t>
             </a:r>
           </a:p>
         </p:txBody>
@@ -5604,67 +5443,117 @@
                 </a:solidFill>
                 <a:latin typeface="Calibri"/>
               </a:rPr>
-              <a:t>Wording is as important as logic. Please rewrite it freely.</a:t>
-            </a:r>
-          </a:p>
-        </p:txBody>
-      </p:sp>
-      <p:sp>
-        <p:nvSpPr>
-          <p:cNvPr id="8" name="Rectangle 7"/>
-          <p:cNvSpPr/>
-          <p:nvPr/>
-        </p:nvSpPr>
-        <p:spPr>
-          <a:xfrm>
-            <a:off x="548640" y="1737360"/>
-            <a:ext cx="11064240" cy="1234440"/>
-          </a:xfrm>
-          <a:prstGeom prst="rect">
-            <a:avLst/>
-          </a:prstGeom>
-          <a:solidFill>
-            <a:srgbClr val="F2F6F9"/>
-          </a:solidFill>
-          <a:ln w="19050">
-            <a:solidFill>
-              <a:srgbClr val="B42318"/>
-            </a:solidFill>
-          </a:ln>
-          <a:effectLst/>
-        </p:spPr>
-        <p:style>
-          <a:lnRef idx="1">
-            <a:schemeClr val="accent1"/>
-          </a:lnRef>
-          <a:fillRef idx="3">
-            <a:schemeClr val="accent1"/>
-          </a:fillRef>
-          <a:effectRef idx="2">
-            <a:schemeClr val="accent1"/>
-          </a:effectRef>
-          <a:fontRef idx="minor">
-            <a:schemeClr val="lt1"/>
-          </a:fontRef>
-        </p:style>
-        <p:txBody>
-          <a:bodyPr rtlCol="0" anchor="ctr"/>
-          <a:lstStyle/>
-          <a:p>
-            <a:pPr algn="ctr"/>
-          </a:p>
-        </p:txBody>
-      </p:sp>
-      <p:sp>
-        <p:nvSpPr>
-          <p:cNvPr id="9" name="TextBox 8"/>
+              <a:t>A "yes" to any of these sends the person straight to EMERGENCY</a:t>
+            </a:r>
+          </a:p>
+        </p:txBody>
+      </p:sp>
+      <p:pic>
+        <p:nvPicPr>
+          <p:cNvPr id="8" name="Picture 7" descr="f_stroke.png"/>
+          <p:cNvPicPr>
+            <a:picLocks noChangeAspect="1"/>
+          </p:cNvPicPr>
+          <p:nvPr/>
+        </p:nvPicPr>
+        <p:blipFill>
+          <a:blip r:embed="rId2"/>
+          <a:stretch>
+            <a:fillRect/>
+          </a:stretch>
+        </p:blipFill>
+        <p:spPr>
+          <a:xfrm>
+            <a:off x="548640" y="1783080"/>
+            <a:ext cx="2651760" cy="2651760"/>
+          </a:xfrm>
+          <a:prstGeom prst="rect">
+            <a:avLst/>
+          </a:prstGeom>
+        </p:spPr>
+      </p:pic>
+      <p:pic>
+        <p:nvPicPr>
+          <p:cNvPr id="9" name="Picture 8" descr="m_stroke.png"/>
+          <p:cNvPicPr>
+            <a:picLocks noChangeAspect="1"/>
+          </p:cNvPicPr>
+          <p:nvPr/>
+        </p:nvPicPr>
+        <p:blipFill>
+          <a:blip r:embed="rId3"/>
+          <a:stretch>
+            <a:fillRect/>
+          </a:stretch>
+        </p:blipFill>
+        <p:spPr>
+          <a:xfrm>
+            <a:off x="3383280" y="1783080"/>
+            <a:ext cx="2651760" cy="2651760"/>
+          </a:xfrm>
+          <a:prstGeom prst="rect">
+            <a:avLst/>
+          </a:prstGeom>
+        </p:spPr>
+      </p:pic>
+      <p:pic>
+        <p:nvPicPr>
+          <p:cNvPr id="10" name="Picture 9" descr="f_chest.png"/>
+          <p:cNvPicPr>
+            <a:picLocks noChangeAspect="1"/>
+          </p:cNvPicPr>
+          <p:nvPr/>
+        </p:nvPicPr>
+        <p:blipFill>
+          <a:blip r:embed="rId4"/>
+          <a:stretch>
+            <a:fillRect/>
+          </a:stretch>
+        </p:blipFill>
+        <p:spPr>
+          <a:xfrm>
+            <a:off x="6217920" y="1783080"/>
+            <a:ext cx="2651760" cy="2651760"/>
+          </a:xfrm>
+          <a:prstGeom prst="rect">
+            <a:avLst/>
+          </a:prstGeom>
+        </p:spPr>
+      </p:pic>
+      <p:pic>
+        <p:nvPicPr>
+          <p:cNvPr id="11" name="Picture 10" descr="m_chest_b.png"/>
+          <p:cNvPicPr>
+            <a:picLocks noChangeAspect="1"/>
+          </p:cNvPicPr>
+          <p:nvPr/>
+        </p:nvPicPr>
+        <p:blipFill>
+          <a:blip r:embed="rId5"/>
+          <a:stretch>
+            <a:fillRect/>
+          </a:stretch>
+        </p:blipFill>
+        <p:spPr>
+          <a:xfrm>
+            <a:off x="9052560" y="1783080"/>
+            <a:ext cx="2651760" cy="2651760"/>
+          </a:xfrm>
+          <a:prstGeom prst="rect">
+            <a:avLst/>
+          </a:prstGeom>
+        </p:spPr>
+      </p:pic>
+      <p:sp>
+        <p:nvSpPr>
+          <p:cNvPr id="12" name="TextBox 11"/>
           <p:cNvSpPr txBox="1"/>
           <p:nvPr/>
         </p:nvSpPr>
         <p:spPr>
           <a:xfrm>
-            <a:off x="685800" y="1783080"/>
-            <a:ext cx="10789920" cy="1188720"/>
+            <a:off x="548640" y="4526280"/>
+            <a:ext cx="5486400" cy="548640"/>
           </a:xfrm>
           <a:prstGeom prst="rect">
             <a:avLst/>
@@ -5683,89 +5572,27 @@
               </a:spcAft>
             </a:pPr>
             <a:r>
-              <a:rPr sz="1400" b="0">
-                <a:solidFill>
-                  <a:srgbClr val="444F5A"/>
-                </a:solidFill>
-                <a:latin typeface="Calibri"/>
-              </a:rPr>
-              <a:t>EMERGENCY</a:t>
-            </a:r>
-          </a:p>
-          <a:p>
-            <a:pPr algn="l">
-              <a:spcAft>
-                <a:spcPts val="500"/>
-              </a:spcAft>
-            </a:pPr>
-            <a:r>
-              <a:rPr sz="1400" b="0">
-                <a:solidFill>
-                  <a:srgbClr val="444F5A"/>
-                </a:solidFill>
-                <a:latin typeface="Calibri"/>
-              </a:rPr>
-              <a:t>"Your answers suggest you should get urgent medical care now. Go to the nearest emergency unit or call emergency services. Do not wait. Do not drive yourself if you feel unwell."</a:t>
-            </a:r>
-          </a:p>
-        </p:txBody>
-      </p:sp>
-      <p:sp>
-        <p:nvSpPr>
-          <p:cNvPr id="10" name="Rectangle 9"/>
-          <p:cNvSpPr/>
-          <p:nvPr/>
-        </p:nvSpPr>
-        <p:spPr>
-          <a:xfrm>
-            <a:off x="548640" y="3108960"/>
-            <a:ext cx="11064240" cy="1234440"/>
-          </a:xfrm>
-          <a:prstGeom prst="rect">
-            <a:avLst/>
-          </a:prstGeom>
-          <a:solidFill>
-            <a:srgbClr val="F2F6F9"/>
-          </a:solidFill>
-          <a:ln w="19050">
-            <a:solidFill>
-              <a:srgbClr val="B46A00"/>
-            </a:solidFill>
-          </a:ln>
-          <a:effectLst/>
-        </p:spPr>
-        <p:style>
-          <a:lnRef idx="1">
-            <a:schemeClr val="accent1"/>
-          </a:lnRef>
-          <a:fillRef idx="3">
-            <a:schemeClr val="accent1"/>
-          </a:fillRef>
-          <a:effectRef idx="2">
-            <a:schemeClr val="accent1"/>
-          </a:effectRef>
-          <a:fontRef idx="minor">
-            <a:schemeClr val="lt1"/>
-          </a:fontRef>
-        </p:style>
-        <p:txBody>
-          <a:bodyPr rtlCol="0" anchor="ctr"/>
-          <a:lstStyle/>
-          <a:p>
-            <a:pPr algn="ctr"/>
-          </a:p>
-        </p:txBody>
-      </p:sp>
-      <p:sp>
-        <p:nvSpPr>
-          <p:cNvPr id="11" name="TextBox 10"/>
+              <a:rPr sz="1400" b="1">
+                <a:solidFill>
+                  <a:srgbClr val="B42318"/>
+                </a:solidFill>
+                <a:latin typeface="Calibri"/>
+              </a:rPr>
+              <a:t>Face drooping, one arm weak, confusion: possible stroke signs.</a:t>
+            </a:r>
+          </a:p>
+        </p:txBody>
+      </p:sp>
+      <p:sp>
+        <p:nvSpPr>
+          <p:cNvPr id="13" name="TextBox 12"/>
           <p:cNvSpPr txBox="1"/>
           <p:nvPr/>
         </p:nvSpPr>
         <p:spPr>
           <a:xfrm>
-            <a:off x="685800" y="3154680"/>
-            <a:ext cx="10789920" cy="1188720"/>
+            <a:off x="6217920" y="4526280"/>
+            <a:ext cx="5486400" cy="548640"/>
           </a:xfrm>
           <a:prstGeom prst="rect">
             <a:avLst/>
@@ -5784,89 +5611,27 @@
               </a:spcAft>
             </a:pPr>
             <a:r>
-              <a:rPr sz="1400" b="0">
-                <a:solidFill>
-                  <a:srgbClr val="444F5A"/>
-                </a:solidFill>
-                <a:latin typeface="Calibri"/>
-              </a:rPr>
-              <a:t>CLINIC TODAY</a:t>
-            </a:r>
-          </a:p>
-          <a:p>
-            <a:pPr algn="l">
-              <a:spcAft>
-                <a:spcPts val="500"/>
-              </a:spcAft>
-            </a:pPr>
-            <a:r>
-              <a:rPr sz="1400" b="0">
-                <a:solidFill>
-                  <a:srgbClr val="444F5A"/>
-                </a:solidFill>
-                <a:latin typeface="Calibri"/>
-              </a:rPr>
-              <a:t>"Please see a doctor or nurse within 24 hours. If you get a stiff neck, confusion, weakness, vision change or a sudden severe worsening, go to emergency care at once."</a:t>
-            </a:r>
-          </a:p>
-        </p:txBody>
-      </p:sp>
-      <p:sp>
-        <p:nvSpPr>
-          <p:cNvPr id="12" name="Rectangle 11"/>
-          <p:cNvSpPr/>
-          <p:nvPr/>
-        </p:nvSpPr>
-        <p:spPr>
-          <a:xfrm>
-            <a:off x="548640" y="4480560"/>
-            <a:ext cx="11064240" cy="1234440"/>
-          </a:xfrm>
-          <a:prstGeom prst="rect">
-            <a:avLst/>
-          </a:prstGeom>
-          <a:solidFill>
-            <a:srgbClr val="F2F6F9"/>
-          </a:solidFill>
-          <a:ln w="19050">
-            <a:solidFill>
-              <a:srgbClr val="1E7B3A"/>
-            </a:solidFill>
-          </a:ln>
-          <a:effectLst/>
-        </p:spPr>
-        <p:style>
-          <a:lnRef idx="1">
-            <a:schemeClr val="accent1"/>
-          </a:lnRef>
-          <a:fillRef idx="3">
-            <a:schemeClr val="accent1"/>
-          </a:fillRef>
-          <a:effectRef idx="2">
-            <a:schemeClr val="accent1"/>
-          </a:effectRef>
-          <a:fontRef idx="minor">
-            <a:schemeClr val="lt1"/>
-          </a:fontRef>
-        </p:style>
-        <p:txBody>
-          <a:bodyPr rtlCol="0" anchor="ctr"/>
-          <a:lstStyle/>
-          <a:p>
-            <a:pPr algn="ctr"/>
-          </a:p>
-        </p:txBody>
-      </p:sp>
-      <p:sp>
-        <p:nvSpPr>
-          <p:cNvPr id="13" name="TextBox 12"/>
+              <a:rPr sz="1400" b="1">
+                <a:solidFill>
+                  <a:srgbClr val="B42318"/>
+                </a:solidFill>
+                <a:latin typeface="Calibri"/>
+              </a:rPr>
+              <a:t>Chest tightness, a squeezing band across the chest: seek urgent care.</a:t>
+            </a:r>
+          </a:p>
+        </p:txBody>
+      </p:sp>
+      <p:sp>
+        <p:nvSpPr>
+          <p:cNvPr id="14" name="TextBox 13"/>
           <p:cNvSpPr txBox="1"/>
           <p:nvPr/>
         </p:nvSpPr>
         <p:spPr>
           <a:xfrm>
-            <a:off x="685800" y="4526280"/>
-            <a:ext cx="10789920" cy="1188720"/>
+            <a:off x="548640" y="5394960"/>
+            <a:ext cx="11064240" cy="914400"/>
           </a:xfrm>
           <a:prstGeom prst="rect">
             <a:avLst/>
@@ -5887,66 +5652,11 @@
             <a:r>
               <a:rPr sz="1400" b="0">
                 <a:solidFill>
-                  <a:srgbClr val="444F5A"/>
-                </a:solidFill>
-                <a:latin typeface="Calibri"/>
-              </a:rPr>
-              <a:t>SELF-CARE</a:t>
-            </a:r>
-          </a:p>
-          <a:p>
-            <a:pPr algn="l">
-              <a:spcAft>
-                <a:spcPts val="500"/>
-              </a:spcAft>
-            </a:pPr>
-            <a:r>
-              <a:rPr sz="1400" b="0">
-                <a:solidFill>
-                  <a:srgbClr val="444F5A"/>
-                </a:solidFill>
-                <a:latin typeface="Calibri"/>
-              </a:rPr>
-              <a:t>"This does not look like an emergency. Rest, drink fluids and take your usual pain relief as directed on the pack. See a clinician if it lasts more than 3 days or gets worse, or if any warning sign appears."</a:t>
-            </a:r>
-          </a:p>
-        </p:txBody>
-      </p:sp>
-      <p:sp>
-        <p:nvSpPr>
-          <p:cNvPr id="14" name="TextBox 13"/>
-          <p:cNvSpPr txBox="1"/>
-          <p:nvPr/>
-        </p:nvSpPr>
-        <p:spPr>
-          <a:xfrm>
-            <a:off x="548640" y="5806440"/>
-            <a:ext cx="11064240" cy="640080"/>
-          </a:xfrm>
-          <a:prstGeom prst="rect">
-            <a:avLst/>
-          </a:prstGeom>
-          <a:noFill/>
-        </p:spPr>
-        <p:txBody>
-          <a:bodyPr wrap="square" anchor="t" lIns="45720" rIns="45720" tIns="27432" bIns="27432">
-            <a:spAutoFit/>
-          </a:bodyPr>
-          <a:lstStyle/>
-          <a:p>
-            <a:pPr algn="l">
-              <a:spcAft>
-                <a:spcPts val="500"/>
-              </a:spcAft>
-            </a:pPr>
-            <a:r>
-              <a:rPr sz="1400" b="1">
-                <a:solidFill>
                   <a:srgbClr val="0B2A4A"/>
                 </a:solidFill>
                 <a:latin typeface="Calibri"/>
               </a:rPr>
-              <a:t>Your call: should the SELF-CARE text mention any specific medicine, or never? We lean towards never, so the app does not advise on drugs.</a:t>
+              <a:t>Your call: should chest tightness appear in a headache flow at all, or only as a separate flow? Are the stroke signs shown clear enough for a non-medical person?</a:t>
             </a:r>
           </a:p>
         </p:txBody>
@@ -6047,7 +5757,7 @@
                 </a:solidFill>
                 <a:latin typeface="Calibri"/>
               </a:rPr>
-              <a:t>What we are asking, and what we will not do</a:t>
+              <a:t>Step 2: if every red flag is "no"</a:t>
             </a:r>
           </a:p>
         </p:txBody>
@@ -6086,7 +5796,1249 @@
                 </a:solidFill>
                 <a:latin typeface="Calibri"/>
               </a:rPr>
-              <a:t>6 / 6</a:t>
+              <a:t>6 / 8</a:t>
+            </a:r>
+          </a:p>
+        </p:txBody>
+      </p:sp>
+      <p:sp>
+        <p:nvSpPr>
+          <p:cNvPr id="5" name="Rectangle 4"/>
+          <p:cNvSpPr/>
+          <p:nvPr/>
+        </p:nvSpPr>
+        <p:spPr>
+          <a:xfrm>
+            <a:off x="0" y="6492240"/>
+            <a:ext cx="12191695" cy="365760"/>
+          </a:xfrm>
+          <a:prstGeom prst="rect">
+            <a:avLst/>
+          </a:prstGeom>
+          <a:solidFill>
+            <a:srgbClr val="F2F6F9"/>
+          </a:solidFill>
+          <a:ln>
+            <a:noFill/>
+          </a:ln>
+          <a:effectLst/>
+        </p:spPr>
+        <p:style>
+          <a:lnRef idx="1">
+            <a:schemeClr val="accent1"/>
+          </a:lnRef>
+          <a:fillRef idx="3">
+            <a:schemeClr val="accent1"/>
+          </a:fillRef>
+          <a:effectRef idx="2">
+            <a:schemeClr val="accent1"/>
+          </a:effectRef>
+          <a:fontRef idx="minor">
+            <a:schemeClr val="lt1"/>
+          </a:fontRef>
+        </p:style>
+        <p:txBody>
+          <a:bodyPr rtlCol="0" anchor="ctr"/>
+          <a:lstStyle/>
+          <a:p>
+            <a:pPr algn="ctr"/>
+          </a:p>
+        </p:txBody>
+      </p:sp>
+      <p:sp>
+        <p:nvSpPr>
+          <p:cNvPr id="6" name="TextBox 5"/>
+          <p:cNvSpPr txBox="1"/>
+          <p:nvPr/>
+        </p:nvSpPr>
+        <p:spPr>
+          <a:xfrm>
+            <a:off x="548640" y="6519672"/>
+            <a:ext cx="11155680" cy="274320"/>
+          </a:xfrm>
+          <a:prstGeom prst="rect">
+            <a:avLst/>
+          </a:prstGeom>
+          <a:noFill/>
+        </p:spPr>
+        <p:txBody>
+          <a:bodyPr wrap="square" anchor="t" lIns="45720" rIns="45720" tIns="27432" bIns="27432">
+            <a:spAutoFit/>
+          </a:bodyPr>
+          <a:lstStyle/>
+          <a:p>
+            <a:pPr algn="l">
+              <a:spcAft>
+                <a:spcPts val="500"/>
+              </a:spcAft>
+            </a:pPr>
+            <a:r>
+              <a:rPr sz="1100" b="0">
+                <a:solidFill>
+                  <a:srgbClr val="444F5A"/>
+                </a:solidFill>
+                <a:latin typeface="Calibri"/>
+              </a:rPr>
+              <a:t>TriageAI headache flow  |  DRAFT for clinician correction  |  Not medical advice  |  BETONIQ WEST LTD</a:t>
+            </a:r>
+          </a:p>
+        </p:txBody>
+      </p:sp>
+      <p:sp>
+        <p:nvSpPr>
+          <p:cNvPr id="7" name="TextBox 6"/>
+          <p:cNvSpPr txBox="1"/>
+          <p:nvPr/>
+        </p:nvSpPr>
+        <p:spPr>
+          <a:xfrm>
+            <a:off x="548640" y="1207008"/>
+            <a:ext cx="11064240" cy="457200"/>
+          </a:xfrm>
+          <a:prstGeom prst="rect">
+            <a:avLst/>
+          </a:prstGeom>
+          <a:noFill/>
+        </p:spPr>
+        <p:txBody>
+          <a:bodyPr wrap="square" anchor="t" lIns="45720" rIns="45720" tIns="27432" bIns="27432">
+            <a:spAutoFit/>
+          </a:bodyPr>
+          <a:lstStyle/>
+          <a:p>
+            <a:pPr algn="l">
+              <a:spcAft>
+                <a:spcPts val="500"/>
+              </a:spcAft>
+            </a:pPr>
+            <a:r>
+              <a:rPr sz="1700" b="0">
+                <a:solidFill>
+                  <a:srgbClr val="0E7C86"/>
+                </a:solidFill>
+                <a:latin typeface="Calibri"/>
+              </a:rPr>
+              <a:t>A few context questions decide between CLINIC TODAY and SELF-CARE</a:t>
+            </a:r>
+          </a:p>
+        </p:txBody>
+      </p:sp>
+      <p:sp>
+        <p:nvSpPr>
+          <p:cNvPr id="8" name="TextBox 7"/>
+          <p:cNvSpPr txBox="1"/>
+          <p:nvPr/>
+        </p:nvSpPr>
+        <p:spPr>
+          <a:xfrm>
+            <a:off x="548640" y="1737360"/>
+            <a:ext cx="5852160" cy="4572000"/>
+          </a:xfrm>
+          <a:prstGeom prst="rect">
+            <a:avLst/>
+          </a:prstGeom>
+          <a:noFill/>
+        </p:spPr>
+        <p:txBody>
+          <a:bodyPr wrap="square" anchor="t" lIns="45720" rIns="45720" tIns="27432" bIns="27432">
+            <a:spAutoFit/>
+          </a:bodyPr>
+          <a:lstStyle/>
+          <a:p>
+            <a:pPr algn="l">
+              <a:spcAft>
+                <a:spcPts val="500"/>
+              </a:spcAft>
+            </a:pPr>
+            <a:r>
+              <a:rPr sz="1500" b="0">
+                <a:solidFill>
+                  <a:srgbClr val="444F5A"/>
+                </a:solidFill>
+                <a:latin typeface="Calibri"/>
+              </a:rPr>
+              <a:t>A.  How long have you had this headache?</a:t>
+            </a:r>
+          </a:p>
+          <a:p>
+            <a:pPr algn="l">
+              <a:spcAft>
+                <a:spcPts val="500"/>
+              </a:spcAft>
+            </a:pPr>
+            <a:r>
+              <a:rPr sz="1500" b="0">
+                <a:solidFill>
+                  <a:srgbClr val="444F5A"/>
+                </a:solidFill>
+                <a:latin typeface="Calibri"/>
+              </a:rPr>
+              <a:t>     Under 24 hours  |  1 to 3 days  |  more than 3 days</a:t>
+            </a:r>
+          </a:p>
+          <a:p>
+            <a:pPr algn="l">
+              <a:spcAft>
+                <a:spcPts val="500"/>
+              </a:spcAft>
+            </a:pPr>
+            <a:r>
+              <a:rPr sz="1500" b="0">
+                <a:solidFill>
+                  <a:srgbClr val="444F5A"/>
+                </a:solidFill>
+                <a:latin typeface="Calibri"/>
+              </a:rPr>
+              <a:t>B.  Is it getting worse day by day, or waking you from sleep?</a:t>
+            </a:r>
+          </a:p>
+          <a:p>
+            <a:pPr algn="l">
+              <a:spcAft>
+                <a:spcPts val="500"/>
+              </a:spcAft>
+            </a:pPr>
+            <a:r>
+              <a:rPr sz="1500" b="0">
+                <a:solidFill>
+                  <a:srgbClr val="444F5A"/>
+                </a:solidFill>
+                <a:latin typeface="Calibri"/>
+              </a:rPr>
+              <a:t>C.  Do you have vomiting that will not stop, or cannot keep fluids down?</a:t>
+            </a:r>
+          </a:p>
+          <a:p>
+            <a:pPr algn="l">
+              <a:spcAft>
+                <a:spcPts val="500"/>
+              </a:spcAft>
+            </a:pPr>
+            <a:r>
+              <a:rPr sz="1500" b="0">
+                <a:solidFill>
+                  <a:srgbClr val="444F5A"/>
+                </a:solidFill>
+                <a:latin typeface="Calibri"/>
+              </a:rPr>
+              <a:t>D.  Are you over 50 with a headache that is new for you?</a:t>
+            </a:r>
+          </a:p>
+          <a:p>
+            <a:pPr algn="l">
+              <a:spcAft>
+                <a:spcPts val="500"/>
+              </a:spcAft>
+            </a:pPr>
+            <a:r>
+              <a:rPr sz="1500" b="0">
+                <a:solidFill>
+                  <a:srgbClr val="444F5A"/>
+                </a:solidFill>
+                <a:latin typeface="Calibri"/>
+              </a:rPr>
+              <a:t>E.  Do you have a long-term illness or a weak immune system?</a:t>
+            </a:r>
+          </a:p>
+          <a:p>
+            <a:pPr algn="l">
+              <a:spcAft>
+                <a:spcPts val="500"/>
+              </a:spcAft>
+            </a:pPr>
+            <a:r>
+              <a:rPr sz="1500" b="0">
+                <a:solidFill>
+                  <a:srgbClr val="444F5A"/>
+                </a:solidFill>
+                <a:latin typeface="Calibri"/>
+              </a:rPr>
+              <a:t>F.  Is the pain stopping you doing normal daily things?</a:t>
+            </a:r>
+          </a:p>
+        </p:txBody>
+      </p:sp>
+      <p:sp>
+        <p:nvSpPr>
+          <p:cNvPr id="9" name="Rectangle 8"/>
+          <p:cNvSpPr/>
+          <p:nvPr/>
+        </p:nvSpPr>
+        <p:spPr>
+          <a:xfrm>
+            <a:off x="6766560" y="1783080"/>
+            <a:ext cx="4937760" cy="2011680"/>
+          </a:xfrm>
+          <a:prstGeom prst="rect">
+            <a:avLst/>
+          </a:prstGeom>
+          <a:solidFill>
+            <a:srgbClr val="F2F6F9"/>
+          </a:solidFill>
+          <a:ln w="19050">
+            <a:solidFill>
+              <a:srgbClr val="B46A00"/>
+            </a:solidFill>
+          </a:ln>
+          <a:effectLst/>
+        </p:spPr>
+        <p:style>
+          <a:lnRef idx="1">
+            <a:schemeClr val="accent1"/>
+          </a:lnRef>
+          <a:fillRef idx="3">
+            <a:schemeClr val="accent1"/>
+          </a:fillRef>
+          <a:effectRef idx="2">
+            <a:schemeClr val="accent1"/>
+          </a:effectRef>
+          <a:fontRef idx="minor">
+            <a:schemeClr val="lt1"/>
+          </a:fontRef>
+        </p:style>
+        <p:txBody>
+          <a:bodyPr rtlCol="0" anchor="ctr"/>
+          <a:lstStyle/>
+          <a:p>
+            <a:pPr algn="ctr"/>
+          </a:p>
+        </p:txBody>
+      </p:sp>
+      <p:sp>
+        <p:nvSpPr>
+          <p:cNvPr id="10" name="TextBox 9"/>
+          <p:cNvSpPr txBox="1"/>
+          <p:nvPr/>
+        </p:nvSpPr>
+        <p:spPr>
+          <a:xfrm>
+            <a:off x="6858000" y="1828800"/>
+            <a:ext cx="4754880" cy="1920240"/>
+          </a:xfrm>
+          <a:prstGeom prst="rect">
+            <a:avLst/>
+          </a:prstGeom>
+          <a:noFill/>
+        </p:spPr>
+        <p:txBody>
+          <a:bodyPr wrap="square" anchor="t" lIns="45720" rIns="45720" tIns="27432" bIns="27432">
+            <a:spAutoFit/>
+          </a:bodyPr>
+          <a:lstStyle/>
+          <a:p>
+            <a:pPr algn="l">
+              <a:spcAft>
+                <a:spcPts val="500"/>
+              </a:spcAft>
+            </a:pPr>
+            <a:r>
+              <a:rPr sz="1400" b="1">
+                <a:solidFill>
+                  <a:srgbClr val="B46A00"/>
+                </a:solidFill>
+                <a:latin typeface="Calibri"/>
+              </a:rPr>
+              <a:t>CLINIC TODAY if any of:</a:t>
+            </a:r>
+          </a:p>
+          <a:p>
+            <a:pPr algn="l">
+              <a:spcAft>
+                <a:spcPts val="500"/>
+              </a:spcAft>
+            </a:pPr>
+            <a:r>
+              <a:rPr sz="1400" b="1">
+                <a:solidFill>
+                  <a:srgbClr val="B46A00"/>
+                </a:solidFill>
+                <a:latin typeface="Calibri"/>
+              </a:rPr>
+              <a:t>B yes  |  C yes  |  D yes  |  E yes  |  A is more than 3 days  |  F yes with fever</a:t>
+            </a:r>
+          </a:p>
+        </p:txBody>
+      </p:sp>
+      <p:sp>
+        <p:nvSpPr>
+          <p:cNvPr id="11" name="Rectangle 10"/>
+          <p:cNvSpPr/>
+          <p:nvPr/>
+        </p:nvSpPr>
+        <p:spPr>
+          <a:xfrm>
+            <a:off x="6766560" y="3931920"/>
+            <a:ext cx="4937760" cy="1463040"/>
+          </a:xfrm>
+          <a:prstGeom prst="rect">
+            <a:avLst/>
+          </a:prstGeom>
+          <a:solidFill>
+            <a:srgbClr val="F2F6F9"/>
+          </a:solidFill>
+          <a:ln w="19050">
+            <a:solidFill>
+              <a:srgbClr val="1E7B3A"/>
+            </a:solidFill>
+          </a:ln>
+          <a:effectLst/>
+        </p:spPr>
+        <p:style>
+          <a:lnRef idx="1">
+            <a:schemeClr val="accent1"/>
+          </a:lnRef>
+          <a:fillRef idx="3">
+            <a:schemeClr val="accent1"/>
+          </a:fillRef>
+          <a:effectRef idx="2">
+            <a:schemeClr val="accent1"/>
+          </a:effectRef>
+          <a:fontRef idx="minor">
+            <a:schemeClr val="lt1"/>
+          </a:fontRef>
+        </p:style>
+        <p:txBody>
+          <a:bodyPr rtlCol="0" anchor="ctr"/>
+          <a:lstStyle/>
+          <a:p>
+            <a:pPr algn="ctr"/>
+          </a:p>
+        </p:txBody>
+      </p:sp>
+      <p:sp>
+        <p:nvSpPr>
+          <p:cNvPr id="12" name="TextBox 11"/>
+          <p:cNvSpPr txBox="1"/>
+          <p:nvPr/>
+        </p:nvSpPr>
+        <p:spPr>
+          <a:xfrm>
+            <a:off x="6858000" y="3977639"/>
+            <a:ext cx="4754880" cy="1371600"/>
+          </a:xfrm>
+          <a:prstGeom prst="rect">
+            <a:avLst/>
+          </a:prstGeom>
+          <a:noFill/>
+        </p:spPr>
+        <p:txBody>
+          <a:bodyPr wrap="square" anchor="t" lIns="45720" rIns="45720" tIns="27432" bIns="27432">
+            <a:spAutoFit/>
+          </a:bodyPr>
+          <a:lstStyle/>
+          <a:p>
+            <a:pPr algn="l">
+              <a:spcAft>
+                <a:spcPts val="500"/>
+              </a:spcAft>
+            </a:pPr>
+            <a:r>
+              <a:rPr sz="1400" b="1">
+                <a:solidFill>
+                  <a:srgbClr val="1E7B3A"/>
+                </a:solidFill>
+                <a:latin typeface="Calibri"/>
+              </a:rPr>
+              <a:t>SELF-CARE if:</a:t>
+            </a:r>
+          </a:p>
+          <a:p>
+            <a:pPr algn="l">
+              <a:spcAft>
+                <a:spcPts val="500"/>
+              </a:spcAft>
+            </a:pPr>
+            <a:r>
+              <a:rPr sz="1400" b="1">
+                <a:solidFill>
+                  <a:srgbClr val="1E7B3A"/>
+                </a:solidFill>
+                <a:latin typeface="Calibri"/>
+              </a:rPr>
+              <a:t>none of the above apply</a:t>
+            </a:r>
+          </a:p>
+        </p:txBody>
+      </p:sp>
+      <p:sp>
+        <p:nvSpPr>
+          <p:cNvPr id="13" name="TextBox 12"/>
+          <p:cNvSpPr txBox="1"/>
+          <p:nvPr/>
+        </p:nvSpPr>
+        <p:spPr>
+          <a:xfrm>
+            <a:off x="6766560" y="5486400"/>
+            <a:ext cx="4937760" cy="914400"/>
+          </a:xfrm>
+          <a:prstGeom prst="rect">
+            <a:avLst/>
+          </a:prstGeom>
+          <a:noFill/>
+        </p:spPr>
+        <p:txBody>
+          <a:bodyPr wrap="square" anchor="t" lIns="45720" rIns="45720" tIns="27432" bIns="27432">
+            <a:spAutoFit/>
+          </a:bodyPr>
+          <a:lstStyle/>
+          <a:p>
+            <a:pPr algn="l">
+              <a:spcAft>
+                <a:spcPts val="500"/>
+              </a:spcAft>
+            </a:pPr>
+            <a:r>
+              <a:rPr sz="1400" b="0">
+                <a:solidFill>
+                  <a:srgbClr val="0B2A4A"/>
+                </a:solidFill>
+                <a:latin typeface="Calibri"/>
+              </a:rPr>
+              <a:t>Your call: are these thresholds sensible, and is anything missing for children?</a:t>
+            </a:r>
+          </a:p>
+        </p:txBody>
+      </p:sp>
+    </p:spTree>
+  </p:cSld>
+  <p:clrMapOvr>
+    <a:masterClrMapping/>
+  </p:clrMapOvr>
+</p:sld>
+</file>
+
+<file path=ppt/slides/slide7.xml><?xml version="1.0" encoding="utf-8"?>
+<p:sld xmlns:a="http://schemas.openxmlformats.org/drawingml/2006/main" xmlns:p="http://schemas.openxmlformats.org/presentationml/2006/main" xmlns:r="http://schemas.openxmlformats.org/officeDocument/2006/relationships">
+  <p:cSld>
+    <p:spTree>
+      <p:nvGrpSpPr>
+        <p:cNvPr id="1" name=""/>
+        <p:cNvGrpSpPr/>
+        <p:nvPr/>
+      </p:nvGrpSpPr>
+      <p:grpSpPr/>
+      <p:sp>
+        <p:nvSpPr>
+          <p:cNvPr id="2" name="Rectangle 1"/>
+          <p:cNvSpPr/>
+          <p:nvPr/>
+        </p:nvSpPr>
+        <p:spPr>
+          <a:xfrm>
+            <a:off x="0" y="0"/>
+            <a:ext cx="12191695" cy="1097280"/>
+          </a:xfrm>
+          <a:prstGeom prst="rect">
+            <a:avLst/>
+          </a:prstGeom>
+          <a:solidFill>
+            <a:srgbClr val="0B2A4A"/>
+          </a:solidFill>
+          <a:ln>
+            <a:noFill/>
+          </a:ln>
+          <a:effectLst/>
+        </p:spPr>
+        <p:style>
+          <a:lnRef idx="1">
+            <a:schemeClr val="accent1"/>
+          </a:lnRef>
+          <a:fillRef idx="3">
+            <a:schemeClr val="accent1"/>
+          </a:fillRef>
+          <a:effectRef idx="2">
+            <a:schemeClr val="accent1"/>
+          </a:effectRef>
+          <a:fontRef idx="minor">
+            <a:schemeClr val="lt1"/>
+          </a:fontRef>
+        </p:style>
+        <p:txBody>
+          <a:bodyPr rtlCol="0" anchor="ctr"/>
+          <a:lstStyle/>
+          <a:p>
+            <a:pPr algn="ctr"/>
+          </a:p>
+        </p:txBody>
+      </p:sp>
+      <p:sp>
+        <p:nvSpPr>
+          <p:cNvPr id="3" name="TextBox 2"/>
+          <p:cNvSpPr txBox="1"/>
+          <p:nvPr/>
+        </p:nvSpPr>
+        <p:spPr>
+          <a:xfrm>
+            <a:off x="548640" y="182880"/>
+            <a:ext cx="10058400" cy="731520"/>
+          </a:xfrm>
+          <a:prstGeom prst="rect">
+            <a:avLst/>
+          </a:prstGeom>
+          <a:noFill/>
+        </p:spPr>
+        <p:txBody>
+          <a:bodyPr wrap="square" anchor="ctr" lIns="45720" rIns="45720" tIns="27432" bIns="27432">
+            <a:spAutoFit/>
+          </a:bodyPr>
+          <a:lstStyle/>
+          <a:p>
+            <a:pPr algn="l">
+              <a:spcAft>
+                <a:spcPts val="500"/>
+              </a:spcAft>
+            </a:pPr>
+            <a:r>
+              <a:rPr sz="3000" b="1">
+                <a:solidFill>
+                  <a:srgbClr val="FFFFFF"/>
+                </a:solidFill>
+                <a:latin typeface="Calibri"/>
+              </a:rPr>
+              <a:t>Step 3: what the person sees</a:t>
+            </a:r>
+          </a:p>
+        </p:txBody>
+      </p:sp>
+      <p:sp>
+        <p:nvSpPr>
+          <p:cNvPr id="4" name="TextBox 3"/>
+          <p:cNvSpPr txBox="1"/>
+          <p:nvPr/>
+        </p:nvSpPr>
+        <p:spPr>
+          <a:xfrm>
+            <a:off x="10607040" y="365760"/>
+            <a:ext cx="1280160" cy="457200"/>
+          </a:xfrm>
+          <a:prstGeom prst="rect">
+            <a:avLst/>
+          </a:prstGeom>
+          <a:noFill/>
+        </p:spPr>
+        <p:txBody>
+          <a:bodyPr wrap="square" anchor="t" lIns="45720" rIns="45720" tIns="27432" bIns="27432">
+            <a:spAutoFit/>
+          </a:bodyPr>
+          <a:lstStyle/>
+          <a:p>
+            <a:pPr algn="r">
+              <a:spcAft>
+                <a:spcPts val="500"/>
+              </a:spcAft>
+            </a:pPr>
+            <a:r>
+              <a:rPr sz="1600" b="0">
+                <a:solidFill>
+                  <a:srgbClr val="BFD4E6"/>
+                </a:solidFill>
+                <a:latin typeface="Calibri"/>
+              </a:rPr>
+              <a:t>7 / 8</a:t>
+            </a:r>
+          </a:p>
+        </p:txBody>
+      </p:sp>
+      <p:sp>
+        <p:nvSpPr>
+          <p:cNvPr id="5" name="Rectangle 4"/>
+          <p:cNvSpPr/>
+          <p:nvPr/>
+        </p:nvSpPr>
+        <p:spPr>
+          <a:xfrm>
+            <a:off x="0" y="6492240"/>
+            <a:ext cx="12191695" cy="365760"/>
+          </a:xfrm>
+          <a:prstGeom prst="rect">
+            <a:avLst/>
+          </a:prstGeom>
+          <a:solidFill>
+            <a:srgbClr val="F2F6F9"/>
+          </a:solidFill>
+          <a:ln>
+            <a:noFill/>
+          </a:ln>
+          <a:effectLst/>
+        </p:spPr>
+        <p:style>
+          <a:lnRef idx="1">
+            <a:schemeClr val="accent1"/>
+          </a:lnRef>
+          <a:fillRef idx="3">
+            <a:schemeClr val="accent1"/>
+          </a:fillRef>
+          <a:effectRef idx="2">
+            <a:schemeClr val="accent1"/>
+          </a:effectRef>
+          <a:fontRef idx="minor">
+            <a:schemeClr val="lt1"/>
+          </a:fontRef>
+        </p:style>
+        <p:txBody>
+          <a:bodyPr rtlCol="0" anchor="ctr"/>
+          <a:lstStyle/>
+          <a:p>
+            <a:pPr algn="ctr"/>
+          </a:p>
+        </p:txBody>
+      </p:sp>
+      <p:sp>
+        <p:nvSpPr>
+          <p:cNvPr id="6" name="TextBox 5"/>
+          <p:cNvSpPr txBox="1"/>
+          <p:nvPr/>
+        </p:nvSpPr>
+        <p:spPr>
+          <a:xfrm>
+            <a:off x="548640" y="6519672"/>
+            <a:ext cx="11155680" cy="274320"/>
+          </a:xfrm>
+          <a:prstGeom prst="rect">
+            <a:avLst/>
+          </a:prstGeom>
+          <a:noFill/>
+        </p:spPr>
+        <p:txBody>
+          <a:bodyPr wrap="square" anchor="t" lIns="45720" rIns="45720" tIns="27432" bIns="27432">
+            <a:spAutoFit/>
+          </a:bodyPr>
+          <a:lstStyle/>
+          <a:p>
+            <a:pPr algn="l">
+              <a:spcAft>
+                <a:spcPts val="500"/>
+              </a:spcAft>
+            </a:pPr>
+            <a:r>
+              <a:rPr sz="1100" b="0">
+                <a:solidFill>
+                  <a:srgbClr val="444F5A"/>
+                </a:solidFill>
+                <a:latin typeface="Calibri"/>
+              </a:rPr>
+              <a:t>TriageAI headache flow  |  DRAFT for clinician correction  |  Not medical advice  |  BETONIQ WEST LTD</a:t>
+            </a:r>
+          </a:p>
+        </p:txBody>
+      </p:sp>
+      <p:sp>
+        <p:nvSpPr>
+          <p:cNvPr id="7" name="TextBox 6"/>
+          <p:cNvSpPr txBox="1"/>
+          <p:nvPr/>
+        </p:nvSpPr>
+        <p:spPr>
+          <a:xfrm>
+            <a:off x="548640" y="1207008"/>
+            <a:ext cx="11064240" cy="457200"/>
+          </a:xfrm>
+          <a:prstGeom prst="rect">
+            <a:avLst/>
+          </a:prstGeom>
+          <a:noFill/>
+        </p:spPr>
+        <p:txBody>
+          <a:bodyPr wrap="square" anchor="t" lIns="45720" rIns="45720" tIns="27432" bIns="27432">
+            <a:spAutoFit/>
+          </a:bodyPr>
+          <a:lstStyle/>
+          <a:p>
+            <a:pPr algn="l">
+              <a:spcAft>
+                <a:spcPts val="500"/>
+              </a:spcAft>
+            </a:pPr>
+            <a:r>
+              <a:rPr sz="1700" b="0">
+                <a:solidFill>
+                  <a:srgbClr val="0E7C86"/>
+                </a:solidFill>
+                <a:latin typeface="Calibri"/>
+              </a:rPr>
+              <a:t>Wording is as important as logic. Please rewrite it freely.</a:t>
+            </a:r>
+          </a:p>
+        </p:txBody>
+      </p:sp>
+      <p:sp>
+        <p:nvSpPr>
+          <p:cNvPr id="8" name="Rectangle 7"/>
+          <p:cNvSpPr/>
+          <p:nvPr/>
+        </p:nvSpPr>
+        <p:spPr>
+          <a:xfrm>
+            <a:off x="548640" y="1737360"/>
+            <a:ext cx="11064240" cy="1234440"/>
+          </a:xfrm>
+          <a:prstGeom prst="rect">
+            <a:avLst/>
+          </a:prstGeom>
+          <a:solidFill>
+            <a:srgbClr val="F2F6F9"/>
+          </a:solidFill>
+          <a:ln w="19050">
+            <a:solidFill>
+              <a:srgbClr val="B42318"/>
+            </a:solidFill>
+          </a:ln>
+          <a:effectLst/>
+        </p:spPr>
+        <p:style>
+          <a:lnRef idx="1">
+            <a:schemeClr val="accent1"/>
+          </a:lnRef>
+          <a:fillRef idx="3">
+            <a:schemeClr val="accent1"/>
+          </a:fillRef>
+          <a:effectRef idx="2">
+            <a:schemeClr val="accent1"/>
+          </a:effectRef>
+          <a:fontRef idx="minor">
+            <a:schemeClr val="lt1"/>
+          </a:fontRef>
+        </p:style>
+        <p:txBody>
+          <a:bodyPr rtlCol="0" anchor="ctr"/>
+          <a:lstStyle/>
+          <a:p>
+            <a:pPr algn="ctr"/>
+          </a:p>
+        </p:txBody>
+      </p:sp>
+      <p:sp>
+        <p:nvSpPr>
+          <p:cNvPr id="9" name="TextBox 8"/>
+          <p:cNvSpPr txBox="1"/>
+          <p:nvPr/>
+        </p:nvSpPr>
+        <p:spPr>
+          <a:xfrm>
+            <a:off x="685800" y="1783080"/>
+            <a:ext cx="10789920" cy="1188720"/>
+          </a:xfrm>
+          <a:prstGeom prst="rect">
+            <a:avLst/>
+          </a:prstGeom>
+          <a:noFill/>
+        </p:spPr>
+        <p:txBody>
+          <a:bodyPr wrap="square" anchor="t" lIns="45720" rIns="45720" tIns="27432" bIns="27432">
+            <a:spAutoFit/>
+          </a:bodyPr>
+          <a:lstStyle/>
+          <a:p>
+            <a:pPr algn="l">
+              <a:spcAft>
+                <a:spcPts val="500"/>
+              </a:spcAft>
+            </a:pPr>
+            <a:r>
+              <a:rPr sz="1400" b="0">
+                <a:solidFill>
+                  <a:srgbClr val="444F5A"/>
+                </a:solidFill>
+                <a:latin typeface="Calibri"/>
+              </a:rPr>
+              <a:t>EMERGENCY</a:t>
+            </a:r>
+          </a:p>
+          <a:p>
+            <a:pPr algn="l">
+              <a:spcAft>
+                <a:spcPts val="500"/>
+              </a:spcAft>
+            </a:pPr>
+            <a:r>
+              <a:rPr sz="1400" b="0">
+                <a:solidFill>
+                  <a:srgbClr val="444F5A"/>
+                </a:solidFill>
+                <a:latin typeface="Calibri"/>
+              </a:rPr>
+              <a:t>"Your answers suggest you should get urgent medical care now. Go to the nearest emergency unit or call emergency services. Do not wait. Do not drive yourself if you feel unwell."</a:t>
+            </a:r>
+          </a:p>
+        </p:txBody>
+      </p:sp>
+      <p:sp>
+        <p:nvSpPr>
+          <p:cNvPr id="10" name="Rectangle 9"/>
+          <p:cNvSpPr/>
+          <p:nvPr/>
+        </p:nvSpPr>
+        <p:spPr>
+          <a:xfrm>
+            <a:off x="548640" y="3108960"/>
+            <a:ext cx="11064240" cy="1234440"/>
+          </a:xfrm>
+          <a:prstGeom prst="rect">
+            <a:avLst/>
+          </a:prstGeom>
+          <a:solidFill>
+            <a:srgbClr val="F2F6F9"/>
+          </a:solidFill>
+          <a:ln w="19050">
+            <a:solidFill>
+              <a:srgbClr val="B46A00"/>
+            </a:solidFill>
+          </a:ln>
+          <a:effectLst/>
+        </p:spPr>
+        <p:style>
+          <a:lnRef idx="1">
+            <a:schemeClr val="accent1"/>
+          </a:lnRef>
+          <a:fillRef idx="3">
+            <a:schemeClr val="accent1"/>
+          </a:fillRef>
+          <a:effectRef idx="2">
+            <a:schemeClr val="accent1"/>
+          </a:effectRef>
+          <a:fontRef idx="minor">
+            <a:schemeClr val="lt1"/>
+          </a:fontRef>
+        </p:style>
+        <p:txBody>
+          <a:bodyPr rtlCol="0" anchor="ctr"/>
+          <a:lstStyle/>
+          <a:p>
+            <a:pPr algn="ctr"/>
+          </a:p>
+        </p:txBody>
+      </p:sp>
+      <p:sp>
+        <p:nvSpPr>
+          <p:cNvPr id="11" name="TextBox 10"/>
+          <p:cNvSpPr txBox="1"/>
+          <p:nvPr/>
+        </p:nvSpPr>
+        <p:spPr>
+          <a:xfrm>
+            <a:off x="685800" y="3154680"/>
+            <a:ext cx="10789920" cy="1188720"/>
+          </a:xfrm>
+          <a:prstGeom prst="rect">
+            <a:avLst/>
+          </a:prstGeom>
+          <a:noFill/>
+        </p:spPr>
+        <p:txBody>
+          <a:bodyPr wrap="square" anchor="t" lIns="45720" rIns="45720" tIns="27432" bIns="27432">
+            <a:spAutoFit/>
+          </a:bodyPr>
+          <a:lstStyle/>
+          <a:p>
+            <a:pPr algn="l">
+              <a:spcAft>
+                <a:spcPts val="500"/>
+              </a:spcAft>
+            </a:pPr>
+            <a:r>
+              <a:rPr sz="1400" b="0">
+                <a:solidFill>
+                  <a:srgbClr val="444F5A"/>
+                </a:solidFill>
+                <a:latin typeface="Calibri"/>
+              </a:rPr>
+              <a:t>CLINIC TODAY</a:t>
+            </a:r>
+          </a:p>
+          <a:p>
+            <a:pPr algn="l">
+              <a:spcAft>
+                <a:spcPts val="500"/>
+              </a:spcAft>
+            </a:pPr>
+            <a:r>
+              <a:rPr sz="1400" b="0">
+                <a:solidFill>
+                  <a:srgbClr val="444F5A"/>
+                </a:solidFill>
+                <a:latin typeface="Calibri"/>
+              </a:rPr>
+              <a:t>"Please see a doctor or nurse within 24 hours. If you get a stiff neck, confusion, weakness, vision change or a sudden severe worsening, go to emergency care at once."</a:t>
+            </a:r>
+          </a:p>
+        </p:txBody>
+      </p:sp>
+      <p:sp>
+        <p:nvSpPr>
+          <p:cNvPr id="12" name="Rectangle 11"/>
+          <p:cNvSpPr/>
+          <p:nvPr/>
+        </p:nvSpPr>
+        <p:spPr>
+          <a:xfrm>
+            <a:off x="548640" y="4480560"/>
+            <a:ext cx="11064240" cy="1234440"/>
+          </a:xfrm>
+          <a:prstGeom prst="rect">
+            <a:avLst/>
+          </a:prstGeom>
+          <a:solidFill>
+            <a:srgbClr val="F2F6F9"/>
+          </a:solidFill>
+          <a:ln w="19050">
+            <a:solidFill>
+              <a:srgbClr val="1E7B3A"/>
+            </a:solidFill>
+          </a:ln>
+          <a:effectLst/>
+        </p:spPr>
+        <p:style>
+          <a:lnRef idx="1">
+            <a:schemeClr val="accent1"/>
+          </a:lnRef>
+          <a:fillRef idx="3">
+            <a:schemeClr val="accent1"/>
+          </a:fillRef>
+          <a:effectRef idx="2">
+            <a:schemeClr val="accent1"/>
+          </a:effectRef>
+          <a:fontRef idx="minor">
+            <a:schemeClr val="lt1"/>
+          </a:fontRef>
+        </p:style>
+        <p:txBody>
+          <a:bodyPr rtlCol="0" anchor="ctr"/>
+          <a:lstStyle/>
+          <a:p>
+            <a:pPr algn="ctr"/>
+          </a:p>
+        </p:txBody>
+      </p:sp>
+      <p:sp>
+        <p:nvSpPr>
+          <p:cNvPr id="13" name="TextBox 12"/>
+          <p:cNvSpPr txBox="1"/>
+          <p:nvPr/>
+        </p:nvSpPr>
+        <p:spPr>
+          <a:xfrm>
+            <a:off x="685800" y="4526280"/>
+            <a:ext cx="10789920" cy="1188720"/>
+          </a:xfrm>
+          <a:prstGeom prst="rect">
+            <a:avLst/>
+          </a:prstGeom>
+          <a:noFill/>
+        </p:spPr>
+        <p:txBody>
+          <a:bodyPr wrap="square" anchor="t" lIns="45720" rIns="45720" tIns="27432" bIns="27432">
+            <a:spAutoFit/>
+          </a:bodyPr>
+          <a:lstStyle/>
+          <a:p>
+            <a:pPr algn="l">
+              <a:spcAft>
+                <a:spcPts val="500"/>
+              </a:spcAft>
+            </a:pPr>
+            <a:r>
+              <a:rPr sz="1400" b="0">
+                <a:solidFill>
+                  <a:srgbClr val="444F5A"/>
+                </a:solidFill>
+                <a:latin typeface="Calibri"/>
+              </a:rPr>
+              <a:t>SELF-CARE</a:t>
+            </a:r>
+          </a:p>
+          <a:p>
+            <a:pPr algn="l">
+              <a:spcAft>
+                <a:spcPts val="500"/>
+              </a:spcAft>
+            </a:pPr>
+            <a:r>
+              <a:rPr sz="1400" b="0">
+                <a:solidFill>
+                  <a:srgbClr val="444F5A"/>
+                </a:solidFill>
+                <a:latin typeface="Calibri"/>
+              </a:rPr>
+              <a:t>"This does not look like an emergency. Rest, drink fluids and take your usual pain relief as directed on the pack. See a clinician if it lasts more than 3 days or gets worse, or if any warning sign appears."</a:t>
+            </a:r>
+          </a:p>
+        </p:txBody>
+      </p:sp>
+      <p:sp>
+        <p:nvSpPr>
+          <p:cNvPr id="14" name="TextBox 13"/>
+          <p:cNvSpPr txBox="1"/>
+          <p:nvPr/>
+        </p:nvSpPr>
+        <p:spPr>
+          <a:xfrm>
+            <a:off x="548640" y="5806440"/>
+            <a:ext cx="11064240" cy="640080"/>
+          </a:xfrm>
+          <a:prstGeom prst="rect">
+            <a:avLst/>
+          </a:prstGeom>
+          <a:noFill/>
+        </p:spPr>
+        <p:txBody>
+          <a:bodyPr wrap="square" anchor="t" lIns="45720" rIns="45720" tIns="27432" bIns="27432">
+            <a:spAutoFit/>
+          </a:bodyPr>
+          <a:lstStyle/>
+          <a:p>
+            <a:pPr algn="l">
+              <a:spcAft>
+                <a:spcPts val="500"/>
+              </a:spcAft>
+            </a:pPr>
+            <a:r>
+              <a:rPr sz="1400" b="1">
+                <a:solidFill>
+                  <a:srgbClr val="0B2A4A"/>
+                </a:solidFill>
+                <a:latin typeface="Calibri"/>
+              </a:rPr>
+              <a:t>Your call: should the SELF-CARE text mention any specific medicine, or never? We lean towards never, so the app does not advise on drugs.</a:t>
+            </a:r>
+          </a:p>
+        </p:txBody>
+      </p:sp>
+    </p:spTree>
+  </p:cSld>
+  <p:clrMapOvr>
+    <a:masterClrMapping/>
+  </p:clrMapOvr>
+</p:sld>
+</file>
+
+<file path=ppt/slides/slide8.xml><?xml version="1.0" encoding="utf-8"?>
+<p:sld xmlns:a="http://schemas.openxmlformats.org/drawingml/2006/main" xmlns:p="http://schemas.openxmlformats.org/presentationml/2006/main" xmlns:r="http://schemas.openxmlformats.org/officeDocument/2006/relationships">
+  <p:cSld>
+    <p:spTree>
+      <p:nvGrpSpPr>
+        <p:cNvPr id="1" name=""/>
+        <p:cNvGrpSpPr/>
+        <p:nvPr/>
+      </p:nvGrpSpPr>
+      <p:grpSpPr/>
+      <p:sp>
+        <p:nvSpPr>
+          <p:cNvPr id="2" name="Rectangle 1"/>
+          <p:cNvSpPr/>
+          <p:nvPr/>
+        </p:nvSpPr>
+        <p:spPr>
+          <a:xfrm>
+            <a:off x="0" y="0"/>
+            <a:ext cx="12191695" cy="1097280"/>
+          </a:xfrm>
+          <a:prstGeom prst="rect">
+            <a:avLst/>
+          </a:prstGeom>
+          <a:solidFill>
+            <a:srgbClr val="0B2A4A"/>
+          </a:solidFill>
+          <a:ln>
+            <a:noFill/>
+          </a:ln>
+          <a:effectLst/>
+        </p:spPr>
+        <p:style>
+          <a:lnRef idx="1">
+            <a:schemeClr val="accent1"/>
+          </a:lnRef>
+          <a:fillRef idx="3">
+            <a:schemeClr val="accent1"/>
+          </a:fillRef>
+          <a:effectRef idx="2">
+            <a:schemeClr val="accent1"/>
+          </a:effectRef>
+          <a:fontRef idx="minor">
+            <a:schemeClr val="lt1"/>
+          </a:fontRef>
+        </p:style>
+        <p:txBody>
+          <a:bodyPr rtlCol="0" anchor="ctr"/>
+          <a:lstStyle/>
+          <a:p>
+            <a:pPr algn="ctr"/>
+          </a:p>
+        </p:txBody>
+      </p:sp>
+      <p:sp>
+        <p:nvSpPr>
+          <p:cNvPr id="3" name="TextBox 2"/>
+          <p:cNvSpPr txBox="1"/>
+          <p:nvPr/>
+        </p:nvSpPr>
+        <p:spPr>
+          <a:xfrm>
+            <a:off x="548640" y="182880"/>
+            <a:ext cx="10058400" cy="731520"/>
+          </a:xfrm>
+          <a:prstGeom prst="rect">
+            <a:avLst/>
+          </a:prstGeom>
+          <a:noFill/>
+        </p:spPr>
+        <p:txBody>
+          <a:bodyPr wrap="square" anchor="ctr" lIns="45720" rIns="45720" tIns="27432" bIns="27432">
+            <a:spAutoFit/>
+          </a:bodyPr>
+          <a:lstStyle/>
+          <a:p>
+            <a:pPr algn="l">
+              <a:spcAft>
+                <a:spcPts val="500"/>
+              </a:spcAft>
+            </a:pPr>
+            <a:r>
+              <a:rPr sz="3000" b="1">
+                <a:solidFill>
+                  <a:srgbClr val="FFFFFF"/>
+                </a:solidFill>
+                <a:latin typeface="Calibri"/>
+              </a:rPr>
+              <a:t>What we are asking, and what we will not do</a:t>
+            </a:r>
+          </a:p>
+        </p:txBody>
+      </p:sp>
+      <p:sp>
+        <p:nvSpPr>
+          <p:cNvPr id="4" name="TextBox 3"/>
+          <p:cNvSpPr txBox="1"/>
+          <p:nvPr/>
+        </p:nvSpPr>
+        <p:spPr>
+          <a:xfrm>
+            <a:off x="10607040" y="365760"/>
+            <a:ext cx="1280160" cy="457200"/>
+          </a:xfrm>
+          <a:prstGeom prst="rect">
+            <a:avLst/>
+          </a:prstGeom>
+          <a:noFill/>
+        </p:spPr>
+        <p:txBody>
+          <a:bodyPr wrap="square" anchor="t" lIns="45720" rIns="45720" tIns="27432" bIns="27432">
+            <a:spAutoFit/>
+          </a:bodyPr>
+          <a:lstStyle/>
+          <a:p>
+            <a:pPr algn="r">
+              <a:spcAft>
+                <a:spcPts val="500"/>
+              </a:spcAft>
+            </a:pPr>
+            <a:r>
+              <a:rPr sz="1600" b="0">
+                <a:solidFill>
+                  <a:srgbClr val="BFD4E6"/>
+                </a:solidFill>
+                <a:latin typeface="Calibri"/>
+              </a:rPr>
+              <a:t>8 / 8</a:t>
             </a:r>
           </a:p>
         </p:txBody>
